--- a/resources/slides/04_routing.pptx
+++ b/resources/slides/04_routing.pptx
@@ -4,6 +4,9 @@
   <p:sldMasterIdLst>
     <p:sldMasterId id="2147483648" r:id="rId1"/>
   </p:sldMasterIdLst>
+  <p:notesMasterIdLst>
+    <p:notesMasterId r:id="rId34"/>
+  </p:notesMasterIdLst>
   <p:sldIdLst>
     <p:sldId id="256" r:id="rId2"/>
     <p:sldId id="257" r:id="rId3"/>
@@ -143,6 +146,355 @@
 </p:presentation>
 </file>
 
+<file path=ppt/notesMasters/notesMaster1.xml><?xml version="1.0" encoding="utf-8"?>
+<p:notesMaster xmlns:a="http://schemas.openxmlformats.org/drawingml/2006/main" xmlns:r="http://schemas.openxmlformats.org/officeDocument/2006/relationships" xmlns:p="http://schemas.openxmlformats.org/presentationml/2006/main">
+  <p:cSld>
+    <p:bg>
+      <p:bgRef idx="1001">
+        <a:schemeClr val="bg1"/>
+      </p:bgRef>
+    </p:bg>
+    <p:spTree>
+      <p:nvGrpSpPr>
+        <p:cNvPr id="1" name=""/>
+        <p:cNvGrpSpPr/>
+        <p:nvPr/>
+      </p:nvGrpSpPr>
+      <p:grpSpPr>
+        <a:xfrm>
+          <a:off x="0" y="0"/>
+          <a:ext cx="0" cy="0"/>
+          <a:chOff x="0" y="0"/>
+          <a:chExt cx="0" cy="0"/>
+        </a:xfrm>
+      </p:grpSpPr>
+      <p:sp>
+        <p:nvSpPr>
+          <p:cNvPr id="2" name="Header Placeholder 1"/>
+          <p:cNvSpPr>
+            <a:spLocks noGrp="1"/>
+          </p:cNvSpPr>
+          <p:nvPr>
+            <p:ph type="hdr" sz="quarter"/>
+          </p:nvPr>
+        </p:nvSpPr>
+        <p:spPr>
+          <a:xfrm>
+            <a:off x="0" y="0"/>
+            <a:ext cx="2971800" cy="458788"/>
+          </a:xfrm>
+          <a:prstGeom prst="rect">
+            <a:avLst/>
+          </a:prstGeom>
+        </p:spPr>
+        <p:txBody>
+          <a:bodyPr vert="horz" lIns="91440" tIns="45720" rIns="91440" bIns="45720" rtlCol="0"/>
+          <a:lstStyle>
+            <a:lvl1pPr algn="l">
+              <a:defRPr sz="1200"/>
+            </a:lvl1pPr>
+          </a:lstStyle>
+          <a:p>
+            <a:endParaRPr lang="en-US"/>
+          </a:p>
+        </p:txBody>
+      </p:sp>
+      <p:sp>
+        <p:nvSpPr>
+          <p:cNvPr id="3" name="Date Placeholder 2"/>
+          <p:cNvSpPr>
+            <a:spLocks noGrp="1"/>
+          </p:cNvSpPr>
+          <p:nvPr>
+            <p:ph type="dt" idx="1"/>
+          </p:nvPr>
+        </p:nvSpPr>
+        <p:spPr>
+          <a:xfrm>
+            <a:off x="3884613" y="0"/>
+            <a:ext cx="2971800" cy="458788"/>
+          </a:xfrm>
+          <a:prstGeom prst="rect">
+            <a:avLst/>
+          </a:prstGeom>
+        </p:spPr>
+        <p:txBody>
+          <a:bodyPr vert="horz" lIns="91440" tIns="45720" rIns="91440" bIns="45720" rtlCol="0"/>
+          <a:lstStyle>
+            <a:lvl1pPr algn="r">
+              <a:defRPr sz="1200"/>
+            </a:lvl1pPr>
+          </a:lstStyle>
+          <a:p>
+            <a:fld id="{1D87F42E-0C12-044E-AD10-3170CA209CC6}" type="datetimeFigureOut">
+              <a:rPr lang="en-US" smtClean="0"/>
+              <a:t>9/25/26</a:t>
+            </a:fld>
+            <a:endParaRPr lang="en-US"/>
+          </a:p>
+        </p:txBody>
+      </p:sp>
+      <p:sp>
+        <p:nvSpPr>
+          <p:cNvPr id="4" name="Slide Image Placeholder 3"/>
+          <p:cNvSpPr>
+            <a:spLocks noGrp="1" noRot="1" noChangeAspect="1"/>
+          </p:cNvSpPr>
+          <p:nvPr>
+            <p:ph type="sldImg" idx="2"/>
+          </p:nvPr>
+        </p:nvSpPr>
+        <p:spPr>
+          <a:xfrm>
+            <a:off x="685800" y="1143000"/>
+            <a:ext cx="5486400" cy="3086100"/>
+          </a:xfrm>
+          <a:prstGeom prst="rect">
+            <a:avLst/>
+          </a:prstGeom>
+          <a:noFill/>
+          <a:ln w="12700">
+            <a:solidFill>
+              <a:prstClr val="black"/>
+            </a:solidFill>
+          </a:ln>
+        </p:spPr>
+        <p:txBody>
+          <a:bodyPr vert="horz" lIns="91440" tIns="45720" rIns="91440" bIns="45720" rtlCol="0" anchor="ctr"/>
+          <a:lstStyle/>
+          <a:p>
+            <a:endParaRPr lang="en-US"/>
+          </a:p>
+        </p:txBody>
+      </p:sp>
+      <p:sp>
+        <p:nvSpPr>
+          <p:cNvPr id="5" name="Notes Placeholder 4"/>
+          <p:cNvSpPr>
+            <a:spLocks noGrp="1"/>
+          </p:cNvSpPr>
+          <p:nvPr>
+            <p:ph type="body" sz="quarter" idx="3"/>
+          </p:nvPr>
+        </p:nvSpPr>
+        <p:spPr>
+          <a:xfrm>
+            <a:off x="685800" y="4400550"/>
+            <a:ext cx="5486400" cy="3600450"/>
+          </a:xfrm>
+          <a:prstGeom prst="rect">
+            <a:avLst/>
+          </a:prstGeom>
+        </p:spPr>
+        <p:txBody>
+          <a:bodyPr vert="horz" lIns="91440" tIns="45720" rIns="91440" bIns="45720" rtlCol="0"/>
+          <a:lstStyle/>
+          <a:p>
+            <a:pPr lvl="0"/>
+            <a:r>
+              <a:rPr lang="en-US"/>
+              <a:t>Click to edit Master text styles</a:t>
+            </a:r>
+          </a:p>
+          <a:p>
+            <a:pPr lvl="1"/>
+            <a:r>
+              <a:rPr lang="en-US"/>
+              <a:t>Second level</a:t>
+            </a:r>
+          </a:p>
+          <a:p>
+            <a:pPr lvl="2"/>
+            <a:r>
+              <a:rPr lang="en-US"/>
+              <a:t>Third level</a:t>
+            </a:r>
+          </a:p>
+          <a:p>
+            <a:pPr lvl="3"/>
+            <a:r>
+              <a:rPr lang="en-US"/>
+              <a:t>Fourth level</a:t>
+            </a:r>
+          </a:p>
+          <a:p>
+            <a:pPr lvl="4"/>
+            <a:r>
+              <a:rPr lang="en-US"/>
+              <a:t>Fifth level</a:t>
+            </a:r>
+          </a:p>
+        </p:txBody>
+      </p:sp>
+      <p:sp>
+        <p:nvSpPr>
+          <p:cNvPr id="6" name="Footer Placeholder 5"/>
+          <p:cNvSpPr>
+            <a:spLocks noGrp="1"/>
+          </p:cNvSpPr>
+          <p:nvPr>
+            <p:ph type="ftr" sz="quarter" idx="4"/>
+          </p:nvPr>
+        </p:nvSpPr>
+        <p:spPr>
+          <a:xfrm>
+            <a:off x="0" y="8685213"/>
+            <a:ext cx="2971800" cy="458787"/>
+          </a:xfrm>
+          <a:prstGeom prst="rect">
+            <a:avLst/>
+          </a:prstGeom>
+        </p:spPr>
+        <p:txBody>
+          <a:bodyPr vert="horz" lIns="91440" tIns="45720" rIns="91440" bIns="45720" rtlCol="0" anchor="b"/>
+          <a:lstStyle>
+            <a:lvl1pPr algn="l">
+              <a:defRPr sz="1200"/>
+            </a:lvl1pPr>
+          </a:lstStyle>
+          <a:p>
+            <a:endParaRPr lang="en-US"/>
+          </a:p>
+        </p:txBody>
+      </p:sp>
+      <p:sp>
+        <p:nvSpPr>
+          <p:cNvPr id="7" name="Slide Number Placeholder 6"/>
+          <p:cNvSpPr>
+            <a:spLocks noGrp="1"/>
+          </p:cNvSpPr>
+          <p:nvPr>
+            <p:ph type="sldNum" sz="quarter" idx="5"/>
+          </p:nvPr>
+        </p:nvSpPr>
+        <p:spPr>
+          <a:xfrm>
+            <a:off x="3884613" y="8685213"/>
+            <a:ext cx="2971800" cy="458787"/>
+          </a:xfrm>
+          <a:prstGeom prst="rect">
+            <a:avLst/>
+          </a:prstGeom>
+        </p:spPr>
+        <p:txBody>
+          <a:bodyPr vert="horz" lIns="91440" tIns="45720" rIns="91440" bIns="45720" rtlCol="0" anchor="b"/>
+          <a:lstStyle>
+            <a:lvl1pPr algn="r">
+              <a:defRPr sz="1200"/>
+            </a:lvl1pPr>
+          </a:lstStyle>
+          <a:p>
+            <a:fld id="{673C57C6-338F-784A-BD62-92324E299809}" type="slidenum">
+              <a:rPr lang="en-US" smtClean="0"/>
+              <a:t>‹#›</a:t>
+            </a:fld>
+            <a:endParaRPr lang="en-US"/>
+          </a:p>
+        </p:txBody>
+      </p:sp>
+    </p:spTree>
+    <p:extLst>
+      <p:ext uri="{BB962C8B-B14F-4D97-AF65-F5344CB8AC3E}">
+        <p14:creationId xmlns:p14="http://schemas.microsoft.com/office/powerpoint/2010/main" val="3361923038"/>
+      </p:ext>
+    </p:extLst>
+  </p:cSld>
+  <p:clrMap bg1="lt1" tx1="dk1" bg2="lt2" tx2="dk2" accent1="accent1" accent2="accent2" accent3="accent3" accent4="accent4" accent5="accent5" accent6="accent6" hlink="hlink" folHlink="folHlink"/>
+  <p:notesStyle>
+    <a:lvl1pPr marL="0" algn="l" defTabSz="914400" rtl="0" eaLnBrk="1" latinLnBrk="0" hangingPunct="1">
+      <a:defRPr sz="1200" kern="1200">
+        <a:solidFill>
+          <a:schemeClr val="tx1"/>
+        </a:solidFill>
+        <a:latin typeface="+mn-lt"/>
+        <a:ea typeface="+mn-ea"/>
+        <a:cs typeface="+mn-cs"/>
+      </a:defRPr>
+    </a:lvl1pPr>
+    <a:lvl2pPr marL="457200" algn="l" defTabSz="914400" rtl="0" eaLnBrk="1" latinLnBrk="0" hangingPunct="1">
+      <a:defRPr sz="1200" kern="1200">
+        <a:solidFill>
+          <a:schemeClr val="tx1"/>
+        </a:solidFill>
+        <a:latin typeface="+mn-lt"/>
+        <a:ea typeface="+mn-ea"/>
+        <a:cs typeface="+mn-cs"/>
+      </a:defRPr>
+    </a:lvl2pPr>
+    <a:lvl3pPr marL="914400" algn="l" defTabSz="914400" rtl="0" eaLnBrk="1" latinLnBrk="0" hangingPunct="1">
+      <a:defRPr sz="1200" kern="1200">
+        <a:solidFill>
+          <a:schemeClr val="tx1"/>
+        </a:solidFill>
+        <a:latin typeface="+mn-lt"/>
+        <a:ea typeface="+mn-ea"/>
+        <a:cs typeface="+mn-cs"/>
+      </a:defRPr>
+    </a:lvl3pPr>
+    <a:lvl4pPr marL="1371600" algn="l" defTabSz="914400" rtl="0" eaLnBrk="1" latinLnBrk="0" hangingPunct="1">
+      <a:defRPr sz="1200" kern="1200">
+        <a:solidFill>
+          <a:schemeClr val="tx1"/>
+        </a:solidFill>
+        <a:latin typeface="+mn-lt"/>
+        <a:ea typeface="+mn-ea"/>
+        <a:cs typeface="+mn-cs"/>
+      </a:defRPr>
+    </a:lvl4pPr>
+    <a:lvl5pPr marL="1828800" algn="l" defTabSz="914400" rtl="0" eaLnBrk="1" latinLnBrk="0" hangingPunct="1">
+      <a:defRPr sz="1200" kern="1200">
+        <a:solidFill>
+          <a:schemeClr val="tx1"/>
+        </a:solidFill>
+        <a:latin typeface="+mn-lt"/>
+        <a:ea typeface="+mn-ea"/>
+        <a:cs typeface="+mn-cs"/>
+      </a:defRPr>
+    </a:lvl5pPr>
+    <a:lvl6pPr marL="2286000" algn="l" defTabSz="914400" rtl="0" eaLnBrk="1" latinLnBrk="0" hangingPunct="1">
+      <a:defRPr sz="1200" kern="1200">
+        <a:solidFill>
+          <a:schemeClr val="tx1"/>
+        </a:solidFill>
+        <a:latin typeface="+mn-lt"/>
+        <a:ea typeface="+mn-ea"/>
+        <a:cs typeface="+mn-cs"/>
+      </a:defRPr>
+    </a:lvl6pPr>
+    <a:lvl7pPr marL="2743200" algn="l" defTabSz="914400" rtl="0" eaLnBrk="1" latinLnBrk="0" hangingPunct="1">
+      <a:defRPr sz="1200" kern="1200">
+        <a:solidFill>
+          <a:schemeClr val="tx1"/>
+        </a:solidFill>
+        <a:latin typeface="+mn-lt"/>
+        <a:ea typeface="+mn-ea"/>
+        <a:cs typeface="+mn-cs"/>
+      </a:defRPr>
+    </a:lvl7pPr>
+    <a:lvl8pPr marL="3200400" algn="l" defTabSz="914400" rtl="0" eaLnBrk="1" latinLnBrk="0" hangingPunct="1">
+      <a:defRPr sz="1200" kern="1200">
+        <a:solidFill>
+          <a:schemeClr val="tx1"/>
+        </a:solidFill>
+        <a:latin typeface="+mn-lt"/>
+        <a:ea typeface="+mn-ea"/>
+        <a:cs typeface="+mn-cs"/>
+      </a:defRPr>
+    </a:lvl8pPr>
+    <a:lvl9pPr marL="3657600" algn="l" defTabSz="914400" rtl="0" eaLnBrk="1" latinLnBrk="0" hangingPunct="1">
+      <a:defRPr sz="1200" kern="1200">
+        <a:solidFill>
+          <a:schemeClr val="tx1"/>
+        </a:solidFill>
+        <a:latin typeface="+mn-lt"/>
+        <a:ea typeface="+mn-ea"/>
+        <a:cs typeface="+mn-cs"/>
+      </a:defRPr>
+    </a:lvl9pPr>
+  </p:notesStyle>
+</p:notesMaster>
+</file>
+
 <file path=ppt/slideLayouts/slideLayout1.xml><?xml version="1.0" encoding="utf-8"?>
 <p:sldLayout xmlns:a="http://schemas.openxmlformats.org/drawingml/2006/main" xmlns:r="http://schemas.openxmlformats.org/officeDocument/2006/relationships" xmlns:p="http://schemas.openxmlformats.org/presentationml/2006/main" type="title" preserve="1">
   <p:cSld name="Title Slide">
@@ -396,9 +748,9 @@
           <a:bodyPr/>
           <a:lstStyle/>
           <a:p>
-            <a:fld id="{CC015439-64B1-CE4E-8D65-9A05746CEBEF}" type="datetimeFigureOut">
+            <a:fld id="{A62CFA45-BD61-E34D-A37F-81065189F029}" type="datetime1">
               <a:rPr lang="en-US" smtClean="0"/>
-              <a:t>9/14/26</a:t>
+              <a:t>9/25/26</a:t>
             </a:fld>
             <a:endParaRPr lang="en-US"/>
           </a:p>
@@ -425,7 +777,10 @@
           <a:bodyPr/>
           <a:lstStyle/>
           <a:p>
-            <a:endParaRPr lang="en-US"/>
+            <a:r>
+              <a:rPr lang="en-US"/>
+              <a:t>Copyright Peterson &amp; Davie, 2026</a:t>
+            </a:r>
           </a:p>
         </p:txBody>
       </p:sp>
@@ -628,9 +983,9 @@
           <a:bodyPr/>
           <a:lstStyle/>
           <a:p>
-            <a:fld id="{CC015439-64B1-CE4E-8D65-9A05746CEBEF}" type="datetimeFigureOut">
+            <a:fld id="{D29E3CEE-E305-8045-A805-47D567B3833D}" type="datetime1">
               <a:rPr lang="en-US" smtClean="0"/>
-              <a:t>9/14/26</a:t>
+              <a:t>9/25/26</a:t>
             </a:fld>
             <a:endParaRPr lang="en-US"/>
           </a:p>
@@ -657,7 +1012,10 @@
           <a:bodyPr/>
           <a:lstStyle/>
           <a:p>
-            <a:endParaRPr lang="en-US"/>
+            <a:r>
+              <a:rPr lang="en-US"/>
+              <a:t>Copyright Peterson &amp; Davie, 2026</a:t>
+            </a:r>
           </a:p>
         </p:txBody>
       </p:sp>
@@ -878,9 +1236,9 @@
           <a:bodyPr/>
           <a:lstStyle/>
           <a:p>
-            <a:fld id="{CC015439-64B1-CE4E-8D65-9A05746CEBEF}" type="datetimeFigureOut">
+            <a:fld id="{3E3A8630-0436-FF47-9B42-7F891D038AD4}" type="datetime1">
               <a:rPr lang="en-US" smtClean="0"/>
-              <a:t>9/14/26</a:t>
+              <a:t>9/25/26</a:t>
             </a:fld>
             <a:endParaRPr lang="en-US"/>
           </a:p>
@@ -907,7 +1265,10 @@
           <a:bodyPr/>
           <a:lstStyle/>
           <a:p>
-            <a:endParaRPr lang="en-US"/>
+            <a:r>
+              <a:rPr lang="en-US"/>
+              <a:t>Copyright Peterson &amp; Davie, 2026</a:t>
+            </a:r>
           </a:p>
         </p:txBody>
       </p:sp>
@@ -1143,9 +1504,9 @@
           <a:bodyPr/>
           <a:lstStyle/>
           <a:p>
-            <a:fld id="{CC015439-64B1-CE4E-8D65-9A05746CEBEF}" type="datetimeFigureOut">
+            <a:fld id="{BD64AEA8-D0BB-A14E-97AE-DBA385F6B8E8}" type="datetime1">
               <a:rPr lang="en-US" smtClean="0"/>
-              <a:t>9/14/26</a:t>
+              <a:t>9/25/26</a:t>
             </a:fld>
             <a:endParaRPr lang="en-US"/>
           </a:p>
@@ -1172,7 +1533,10 @@
           <a:bodyPr/>
           <a:lstStyle/>
           <a:p>
-            <a:endParaRPr lang="en-US"/>
+            <a:r>
+              <a:rPr lang="en-US"/>
+              <a:t>Copyright Peterson &amp; Davie, 2026</a:t>
+            </a:r>
           </a:p>
         </p:txBody>
       </p:sp>
@@ -1284,9 +1648,9 @@
           <a:bodyPr/>
           <a:lstStyle/>
           <a:p>
-            <a:fld id="{CC015439-64B1-CE4E-8D65-9A05746CEBEF}" type="datetimeFigureOut">
+            <a:fld id="{E2EC2E31-4AEA-F940-A207-25E5E65EE68D}" type="datetime1">
               <a:rPr lang="en-US" smtClean="0"/>
-              <a:t>9/14/26</a:t>
+              <a:t>9/25/26</a:t>
             </a:fld>
             <a:endParaRPr lang="en-US"/>
           </a:p>
@@ -1313,7 +1677,10 @@
           <a:bodyPr/>
           <a:lstStyle/>
           <a:p>
-            <a:endParaRPr lang="en-US"/>
+            <a:r>
+              <a:rPr lang="en-US"/>
+              <a:t>Copyright Peterson &amp; Davie, 2026</a:t>
+            </a:r>
           </a:p>
         </p:txBody>
       </p:sp>
@@ -1487,9 +1854,9 @@
             </a:lvl1pPr>
           </a:lstStyle>
           <a:p>
-            <a:fld id="{CC015439-64B1-CE4E-8D65-9A05746CEBEF}" type="datetimeFigureOut">
+            <a:fld id="{16A47D43-07C2-CF40-9A9C-B68537DC7AD6}" type="datetime1">
               <a:rPr lang="en-US" smtClean="0"/>
-              <a:t>9/14/26</a:t>
+              <a:t>9/25/26</a:t>
             </a:fld>
             <a:endParaRPr lang="en-US"/>
           </a:p>
@@ -1534,7 +1901,10 @@
             </a:lvl1pPr>
           </a:lstStyle>
           <a:p>
-            <a:endParaRPr lang="en-US"/>
+            <a:r>
+              <a:rPr lang="en-US"/>
+              <a:t>Copyright Peterson &amp; Davie, 2026</a:t>
+            </a:r>
           </a:p>
         </p:txBody>
       </p:sp>
@@ -1690,6 +2060,7 @@
     <p:sldLayoutId id="2147483652" r:id="rId4"/>
     <p:sldLayoutId id="2147483654" r:id="rId5"/>
   </p:sldLayoutIdLst>
+  <p:hf sldNum="0" hdr="0" dt="0"/>
   <p:txStyles>
     <p:titleStyle>
       <a:lvl1pPr algn="l" defTabSz="914400" rtl="0" eaLnBrk="1" latinLnBrk="0" hangingPunct="1">
@@ -2035,6 +2406,34 @@
           </a:p>
         </p:txBody>
       </p:sp>
+      <p:sp>
+        <p:nvSpPr>
+          <p:cNvPr id="4" name="Footer Placeholder 3">
+            <a:extLst>
+              <a:ext uri="{FF2B5EF4-FFF2-40B4-BE49-F238E27FC236}">
+                <a16:creationId xmlns:a16="http://schemas.microsoft.com/office/drawing/2014/main" id="{DA173A8B-E3B3-9C47-7EA2-5A5B96574498}"/>
+              </a:ext>
+            </a:extLst>
+          </p:cNvPr>
+          <p:cNvSpPr>
+            <a:spLocks noGrp="1"/>
+          </p:cNvSpPr>
+          <p:nvPr>
+            <p:ph type="ftr" sz="quarter" idx="11"/>
+          </p:nvPr>
+        </p:nvSpPr>
+        <p:spPr/>
+        <p:txBody>
+          <a:bodyPr/>
+          <a:lstStyle/>
+          <a:p>
+            <a:r>
+              <a:rPr lang="en-US"/>
+              <a:t>Copyright Peterson &amp; Davie, 2026</a:t>
+            </a:r>
+          </a:p>
+        </p:txBody>
+      </p:sp>
     </p:spTree>
   </p:cSld>
   <p:clrMapOvr>
@@ -2081,6 +2480,34 @@
           </a:p>
         </p:txBody>
       </p:sp>
+      <p:sp>
+        <p:nvSpPr>
+          <p:cNvPr id="3" name="Footer Placeholder 2">
+            <a:extLst>
+              <a:ext uri="{FF2B5EF4-FFF2-40B4-BE49-F238E27FC236}">
+                <a16:creationId xmlns:a16="http://schemas.microsoft.com/office/drawing/2014/main" id="{B738C955-F692-F3E9-CB35-0FB6CB058556}"/>
+              </a:ext>
+            </a:extLst>
+          </p:cNvPr>
+          <p:cNvSpPr>
+            <a:spLocks noGrp="1"/>
+          </p:cNvSpPr>
+          <p:nvPr>
+            <p:ph type="ftr" sz="quarter" idx="11"/>
+          </p:nvPr>
+        </p:nvSpPr>
+        <p:spPr/>
+        <p:txBody>
+          <a:bodyPr/>
+          <a:lstStyle/>
+          <a:p>
+            <a:r>
+              <a:rPr lang="en-US"/>
+              <a:t>Copyright Peterson &amp; Davie, 2026</a:t>
+            </a:r>
+          </a:p>
+        </p:txBody>
+      </p:sp>
     </p:spTree>
   </p:cSld>
   <p:clrMapOvr>
@@ -2202,6 +2629,34 @@
           </a:p>
         </p:txBody>
       </p:sp>
+      <p:sp>
+        <p:nvSpPr>
+          <p:cNvPr id="4" name="Footer Placeholder 3">
+            <a:extLst>
+              <a:ext uri="{FF2B5EF4-FFF2-40B4-BE49-F238E27FC236}">
+                <a16:creationId xmlns:a16="http://schemas.microsoft.com/office/drawing/2014/main" id="{5BB8D7DB-A139-E0DC-036D-E372518B6765}"/>
+              </a:ext>
+            </a:extLst>
+          </p:cNvPr>
+          <p:cNvSpPr>
+            <a:spLocks noGrp="1"/>
+          </p:cNvSpPr>
+          <p:nvPr>
+            <p:ph type="ftr" sz="quarter" idx="11"/>
+          </p:nvPr>
+        </p:nvSpPr>
+        <p:spPr/>
+        <p:txBody>
+          <a:bodyPr/>
+          <a:lstStyle/>
+          <a:p>
+            <a:r>
+              <a:rPr lang="en-US"/>
+              <a:t>Copyright Peterson &amp; Davie, 2026</a:t>
+            </a:r>
+          </a:p>
+        </p:txBody>
+      </p:sp>
     </p:spTree>
   </p:cSld>
   <p:clrMapOvr>
@@ -2309,6 +2764,34 @@
           </a:p>
         </p:txBody>
       </p:sp>
+      <p:sp>
+        <p:nvSpPr>
+          <p:cNvPr id="4" name="Footer Placeholder 3">
+            <a:extLst>
+              <a:ext uri="{FF2B5EF4-FFF2-40B4-BE49-F238E27FC236}">
+                <a16:creationId xmlns:a16="http://schemas.microsoft.com/office/drawing/2014/main" id="{04457B6F-F96C-35C2-DF61-1C0D8B1D4F8E}"/>
+              </a:ext>
+            </a:extLst>
+          </p:cNvPr>
+          <p:cNvSpPr>
+            <a:spLocks noGrp="1"/>
+          </p:cNvSpPr>
+          <p:nvPr>
+            <p:ph type="ftr" sz="quarter" idx="11"/>
+          </p:nvPr>
+        </p:nvSpPr>
+        <p:spPr/>
+        <p:txBody>
+          <a:bodyPr/>
+          <a:lstStyle/>
+          <a:p>
+            <a:r>
+              <a:rPr lang="en-US"/>
+              <a:t>Copyright Peterson &amp; Davie, 2026</a:t>
+            </a:r>
+          </a:p>
+        </p:txBody>
+      </p:sp>
     </p:spTree>
   </p:cSld>
   <p:clrMapOvr>
@@ -2420,6 +2903,34 @@
           </a:prstGeom>
         </p:spPr>
       </p:pic>
+      <p:sp>
+        <p:nvSpPr>
+          <p:cNvPr id="5" name="Footer Placeholder 4">
+            <a:extLst>
+              <a:ext uri="{FF2B5EF4-FFF2-40B4-BE49-F238E27FC236}">
+                <a16:creationId xmlns:a16="http://schemas.microsoft.com/office/drawing/2014/main" id="{DD1FEA3E-2F7E-89D6-53D1-381D32FCDBB6}"/>
+              </a:ext>
+            </a:extLst>
+          </p:cNvPr>
+          <p:cNvSpPr>
+            <a:spLocks noGrp="1"/>
+          </p:cNvSpPr>
+          <p:nvPr>
+            <p:ph type="ftr" sz="quarter" idx="11"/>
+          </p:nvPr>
+        </p:nvSpPr>
+        <p:spPr/>
+        <p:txBody>
+          <a:bodyPr/>
+          <a:lstStyle/>
+          <a:p>
+            <a:r>
+              <a:rPr lang="en-US"/>
+              <a:t>Copyright Peterson &amp; Davie, 2026</a:t>
+            </a:r>
+          </a:p>
+        </p:txBody>
+      </p:sp>
     </p:spTree>
   </p:cSld>
   <p:clrMapOvr>
@@ -2715,6 +3226,34 @@
           </a:prstGeom>
         </p:spPr>
       </p:pic>
+      <p:sp>
+        <p:nvSpPr>
+          <p:cNvPr id="3" name="Footer Placeholder 2">
+            <a:extLst>
+              <a:ext uri="{FF2B5EF4-FFF2-40B4-BE49-F238E27FC236}">
+                <a16:creationId xmlns:a16="http://schemas.microsoft.com/office/drawing/2014/main" id="{FCAD7F5D-F3C8-2499-B1B5-98EA58CA2F15}"/>
+              </a:ext>
+            </a:extLst>
+          </p:cNvPr>
+          <p:cNvSpPr>
+            <a:spLocks noGrp="1"/>
+          </p:cNvSpPr>
+          <p:nvPr>
+            <p:ph type="ftr" sz="quarter" idx="11"/>
+          </p:nvPr>
+        </p:nvSpPr>
+        <p:spPr/>
+        <p:txBody>
+          <a:bodyPr/>
+          <a:lstStyle/>
+          <a:p>
+            <a:r>
+              <a:rPr lang="en-US"/>
+              <a:t>Copyright Peterson &amp; Davie, 2026</a:t>
+            </a:r>
+          </a:p>
+        </p:txBody>
+      </p:sp>
     </p:spTree>
   </p:cSld>
   <p:clrMapOvr>
@@ -3240,6 +3779,34 @@
           </a:graphicData>
         </a:graphic>
       </p:graphicFrame>
+      <p:sp>
+        <p:nvSpPr>
+          <p:cNvPr id="5" name="Footer Placeholder 4">
+            <a:extLst>
+              <a:ext uri="{FF2B5EF4-FFF2-40B4-BE49-F238E27FC236}">
+                <a16:creationId xmlns:a16="http://schemas.microsoft.com/office/drawing/2014/main" id="{35340378-FBF7-D980-F64D-FBA37A533F21}"/>
+              </a:ext>
+            </a:extLst>
+          </p:cNvPr>
+          <p:cNvSpPr>
+            <a:spLocks noGrp="1"/>
+          </p:cNvSpPr>
+          <p:nvPr>
+            <p:ph type="ftr" sz="quarter" idx="11"/>
+          </p:nvPr>
+        </p:nvSpPr>
+        <p:spPr/>
+        <p:txBody>
+          <a:bodyPr/>
+          <a:lstStyle/>
+          <a:p>
+            <a:r>
+              <a:rPr lang="en-US"/>
+              <a:t>Copyright Peterson &amp; Davie, 2026</a:t>
+            </a:r>
+          </a:p>
+        </p:txBody>
+      </p:sp>
     </p:spTree>
   </p:cSld>
   <p:clrMapOvr>
@@ -3375,6 +3942,34 @@
               <a:t>Supports authentication of update messages</a:t>
             </a:r>
             <a:endParaRPr dirty="0"/>
+          </a:p>
+        </p:txBody>
+      </p:sp>
+      <p:sp>
+        <p:nvSpPr>
+          <p:cNvPr id="4" name="Footer Placeholder 3">
+            <a:extLst>
+              <a:ext uri="{FF2B5EF4-FFF2-40B4-BE49-F238E27FC236}">
+                <a16:creationId xmlns:a16="http://schemas.microsoft.com/office/drawing/2014/main" id="{76989465-BD52-A236-B057-FCD807BCFBB7}"/>
+              </a:ext>
+            </a:extLst>
+          </p:cNvPr>
+          <p:cNvSpPr>
+            <a:spLocks noGrp="1"/>
+          </p:cNvSpPr>
+          <p:nvPr>
+            <p:ph type="ftr" sz="quarter" idx="11"/>
+          </p:nvPr>
+        </p:nvSpPr>
+        <p:spPr/>
+        <p:txBody>
+          <a:bodyPr/>
+          <a:lstStyle/>
+          <a:p>
+            <a:r>
+              <a:rPr lang="en-US"/>
+              <a:t>Copyright Peterson &amp; Davie, 2026</a:t>
+            </a:r>
           </a:p>
         </p:txBody>
       </p:sp>
@@ -3758,6 +4353,34 @@
           </a:prstGeom>
         </p:spPr>
       </p:pic>
+      <p:sp>
+        <p:nvSpPr>
+          <p:cNvPr id="7" name="Footer Placeholder 6">
+            <a:extLst>
+              <a:ext uri="{FF2B5EF4-FFF2-40B4-BE49-F238E27FC236}">
+                <a16:creationId xmlns:a16="http://schemas.microsoft.com/office/drawing/2014/main" id="{38C4FE9E-AF8D-D8CB-1EAA-F7C7578E7106}"/>
+              </a:ext>
+            </a:extLst>
+          </p:cNvPr>
+          <p:cNvSpPr>
+            <a:spLocks noGrp="1"/>
+          </p:cNvSpPr>
+          <p:nvPr>
+            <p:ph type="ftr" sz="quarter" idx="11"/>
+          </p:nvPr>
+        </p:nvSpPr>
+        <p:spPr/>
+        <p:txBody>
+          <a:bodyPr/>
+          <a:lstStyle/>
+          <a:p>
+            <a:r>
+              <a:rPr lang="en-US"/>
+              <a:t>Copyright Peterson &amp; Davie, 2026</a:t>
+            </a:r>
+          </a:p>
+        </p:txBody>
+      </p:sp>
     </p:spTree>
   </p:cSld>
   <p:clrMapOvr>
@@ -3804,6 +4427,34 @@
           </a:p>
         </p:txBody>
       </p:sp>
+      <p:sp>
+        <p:nvSpPr>
+          <p:cNvPr id="3" name="Footer Placeholder 2">
+            <a:extLst>
+              <a:ext uri="{FF2B5EF4-FFF2-40B4-BE49-F238E27FC236}">
+                <a16:creationId xmlns:a16="http://schemas.microsoft.com/office/drawing/2014/main" id="{7BF6E09E-A93E-8BB3-B0D8-D552789E07CA}"/>
+              </a:ext>
+            </a:extLst>
+          </p:cNvPr>
+          <p:cNvSpPr>
+            <a:spLocks noGrp="1"/>
+          </p:cNvSpPr>
+          <p:nvPr>
+            <p:ph type="ftr" sz="quarter" idx="11"/>
+          </p:nvPr>
+        </p:nvSpPr>
+        <p:spPr/>
+        <p:txBody>
+          <a:bodyPr/>
+          <a:lstStyle/>
+          <a:p>
+            <a:r>
+              <a:rPr lang="en-US"/>
+              <a:t>Copyright Peterson &amp; Davie, 2026</a:t>
+            </a:r>
+          </a:p>
+        </p:txBody>
+      </p:sp>
     </p:spTree>
   </p:cSld>
   <p:clrMapOvr>
@@ -3915,6 +4566,34 @@
           </a:prstGeom>
         </p:spPr>
       </p:pic>
+      <p:sp>
+        <p:nvSpPr>
+          <p:cNvPr id="5" name="Footer Placeholder 4">
+            <a:extLst>
+              <a:ext uri="{FF2B5EF4-FFF2-40B4-BE49-F238E27FC236}">
+                <a16:creationId xmlns:a16="http://schemas.microsoft.com/office/drawing/2014/main" id="{5F7B1FED-95DA-DAA2-8629-FB1258E5A449}"/>
+              </a:ext>
+            </a:extLst>
+          </p:cNvPr>
+          <p:cNvSpPr>
+            <a:spLocks noGrp="1"/>
+          </p:cNvSpPr>
+          <p:nvPr>
+            <p:ph type="ftr" sz="quarter" idx="11"/>
+          </p:nvPr>
+        </p:nvSpPr>
+        <p:spPr/>
+        <p:txBody>
+          <a:bodyPr/>
+          <a:lstStyle/>
+          <a:p>
+            <a:r>
+              <a:rPr lang="en-US"/>
+              <a:t>Copyright Peterson &amp; Davie, 2026</a:t>
+            </a:r>
+          </a:p>
+        </p:txBody>
+      </p:sp>
     </p:spTree>
   </p:cSld>
   <p:clrMapOvr>
@@ -4020,6 +4699,34 @@
               <a:t>four different approaches.</a:t>
             </a:r>
             <a:endParaRPr i="1" dirty="0"/>
+          </a:p>
+        </p:txBody>
+      </p:sp>
+      <p:sp>
+        <p:nvSpPr>
+          <p:cNvPr id="4" name="Footer Placeholder 3">
+            <a:extLst>
+              <a:ext uri="{FF2B5EF4-FFF2-40B4-BE49-F238E27FC236}">
+                <a16:creationId xmlns:a16="http://schemas.microsoft.com/office/drawing/2014/main" id="{41C8C1D0-9D0A-6587-9A1C-12E00958AE67}"/>
+              </a:ext>
+            </a:extLst>
+          </p:cNvPr>
+          <p:cNvSpPr>
+            <a:spLocks noGrp="1"/>
+          </p:cNvSpPr>
+          <p:nvPr>
+            <p:ph type="ftr" sz="quarter" idx="11"/>
+          </p:nvPr>
+        </p:nvSpPr>
+        <p:spPr/>
+        <p:txBody>
+          <a:bodyPr/>
+          <a:lstStyle/>
+          <a:p>
+            <a:r>
+              <a:rPr lang="en-US"/>
+              <a:t>Copyright Peterson &amp; Davie, 2026</a:t>
+            </a:r>
           </a:p>
         </p:txBody>
       </p:sp>
@@ -5098,6 +5805,34 @@
           </a:graphicData>
         </a:graphic>
       </p:graphicFrame>
+      <p:sp>
+        <p:nvSpPr>
+          <p:cNvPr id="4" name="Footer Placeholder 3">
+            <a:extLst>
+              <a:ext uri="{FF2B5EF4-FFF2-40B4-BE49-F238E27FC236}">
+                <a16:creationId xmlns:a16="http://schemas.microsoft.com/office/drawing/2014/main" id="{26B3A49F-614C-FE1D-A7B7-2CDCBC7BB1BE}"/>
+              </a:ext>
+            </a:extLst>
+          </p:cNvPr>
+          <p:cNvSpPr>
+            <a:spLocks noGrp="1"/>
+          </p:cNvSpPr>
+          <p:nvPr>
+            <p:ph type="ftr" sz="quarter" idx="11"/>
+          </p:nvPr>
+        </p:nvSpPr>
+        <p:spPr/>
+        <p:txBody>
+          <a:bodyPr/>
+          <a:lstStyle/>
+          <a:p>
+            <a:r>
+              <a:rPr lang="en-US"/>
+              <a:t>Copyright Peterson &amp; Davie, 2026</a:t>
+            </a:r>
+          </a:p>
+        </p:txBody>
+      </p:sp>
     </p:spTree>
   </p:cSld>
   <p:clrMapOvr>
@@ -5581,6 +6316,34 @@
           </a:graphicData>
         </a:graphic>
       </p:graphicFrame>
+      <p:sp>
+        <p:nvSpPr>
+          <p:cNvPr id="5" name="Footer Placeholder 4">
+            <a:extLst>
+              <a:ext uri="{FF2B5EF4-FFF2-40B4-BE49-F238E27FC236}">
+                <a16:creationId xmlns:a16="http://schemas.microsoft.com/office/drawing/2014/main" id="{C19C8381-6B8A-1D9C-06BD-1610F7AEE0BA}"/>
+              </a:ext>
+            </a:extLst>
+          </p:cNvPr>
+          <p:cNvSpPr>
+            <a:spLocks noGrp="1"/>
+          </p:cNvSpPr>
+          <p:nvPr>
+            <p:ph type="ftr" sz="quarter" idx="11"/>
+          </p:nvPr>
+        </p:nvSpPr>
+        <p:spPr/>
+        <p:txBody>
+          <a:bodyPr/>
+          <a:lstStyle/>
+          <a:p>
+            <a:r>
+              <a:rPr lang="en-US"/>
+              <a:t>Copyright Peterson &amp; Davie, 2026</a:t>
+            </a:r>
+          </a:p>
+        </p:txBody>
+      </p:sp>
     </p:spTree>
   </p:cSld>
   <p:clrMapOvr>
@@ -6058,6 +6821,34 @@
           </a:graphicData>
         </a:graphic>
       </p:graphicFrame>
+      <p:sp>
+        <p:nvSpPr>
+          <p:cNvPr id="5" name="Footer Placeholder 4">
+            <a:extLst>
+              <a:ext uri="{FF2B5EF4-FFF2-40B4-BE49-F238E27FC236}">
+                <a16:creationId xmlns:a16="http://schemas.microsoft.com/office/drawing/2014/main" id="{95A37315-AD3A-9131-24CA-5B5357CE9011}"/>
+              </a:ext>
+            </a:extLst>
+          </p:cNvPr>
+          <p:cNvSpPr>
+            <a:spLocks noGrp="1"/>
+          </p:cNvSpPr>
+          <p:nvPr>
+            <p:ph type="ftr" sz="quarter" idx="11"/>
+          </p:nvPr>
+        </p:nvSpPr>
+        <p:spPr/>
+        <p:txBody>
+          <a:bodyPr/>
+          <a:lstStyle/>
+          <a:p>
+            <a:r>
+              <a:rPr lang="en-US"/>
+              <a:t>Copyright Peterson &amp; Davie, 2026</a:t>
+            </a:r>
+          </a:p>
+        </p:txBody>
+      </p:sp>
     </p:spTree>
   </p:cSld>
   <p:clrMapOvr>
@@ -7133,6 +7924,34 @@
           </a:graphicData>
         </a:graphic>
       </p:graphicFrame>
+      <p:sp>
+        <p:nvSpPr>
+          <p:cNvPr id="4" name="Footer Placeholder 3">
+            <a:extLst>
+              <a:ext uri="{FF2B5EF4-FFF2-40B4-BE49-F238E27FC236}">
+                <a16:creationId xmlns:a16="http://schemas.microsoft.com/office/drawing/2014/main" id="{B8B97BC2-80D1-76E9-F46A-AFAF58DE1D4A}"/>
+              </a:ext>
+            </a:extLst>
+          </p:cNvPr>
+          <p:cNvSpPr>
+            <a:spLocks noGrp="1"/>
+          </p:cNvSpPr>
+          <p:nvPr>
+            <p:ph type="ftr" sz="quarter" idx="11"/>
+          </p:nvPr>
+        </p:nvSpPr>
+        <p:spPr/>
+        <p:txBody>
+          <a:bodyPr/>
+          <a:lstStyle/>
+          <a:p>
+            <a:r>
+              <a:rPr lang="en-US"/>
+              <a:t>Copyright Peterson &amp; Davie, 2026</a:t>
+            </a:r>
+          </a:p>
+        </p:txBody>
+      </p:sp>
     </p:spTree>
   </p:cSld>
   <p:clrMapOvr>
@@ -7289,6 +8108,34 @@
           </a:p>
         </p:txBody>
       </p:sp>
+      <p:sp>
+        <p:nvSpPr>
+          <p:cNvPr id="4" name="Footer Placeholder 3">
+            <a:extLst>
+              <a:ext uri="{FF2B5EF4-FFF2-40B4-BE49-F238E27FC236}">
+                <a16:creationId xmlns:a16="http://schemas.microsoft.com/office/drawing/2014/main" id="{E0F0B801-9D97-3DB5-108F-38EBA684E645}"/>
+              </a:ext>
+            </a:extLst>
+          </p:cNvPr>
+          <p:cNvSpPr>
+            <a:spLocks noGrp="1"/>
+          </p:cNvSpPr>
+          <p:nvPr>
+            <p:ph type="ftr" sz="quarter" idx="11"/>
+          </p:nvPr>
+        </p:nvSpPr>
+        <p:spPr/>
+        <p:txBody>
+          <a:bodyPr/>
+          <a:lstStyle/>
+          <a:p>
+            <a:r>
+              <a:rPr lang="en-US"/>
+              <a:t>Copyright Peterson &amp; Davie, 2026</a:t>
+            </a:r>
+          </a:p>
+        </p:txBody>
+      </p:sp>
     </p:spTree>
   </p:cSld>
   <p:clrMapOvr>
@@ -7692,6 +8539,34 @@
           </a:p>
         </p:txBody>
       </p:sp>
+      <p:sp>
+        <p:nvSpPr>
+          <p:cNvPr id="3" name="Footer Placeholder 2">
+            <a:extLst>
+              <a:ext uri="{FF2B5EF4-FFF2-40B4-BE49-F238E27FC236}">
+                <a16:creationId xmlns:a16="http://schemas.microsoft.com/office/drawing/2014/main" id="{BFAF8A88-EDDE-9C93-216C-72E8B8CE7FC4}"/>
+              </a:ext>
+            </a:extLst>
+          </p:cNvPr>
+          <p:cNvSpPr>
+            <a:spLocks noGrp="1"/>
+          </p:cNvSpPr>
+          <p:nvPr>
+            <p:ph type="ftr" sz="quarter" idx="11"/>
+          </p:nvPr>
+        </p:nvSpPr>
+        <p:spPr/>
+        <p:txBody>
+          <a:bodyPr/>
+          <a:lstStyle/>
+          <a:p>
+            <a:r>
+              <a:rPr lang="en-US"/>
+              <a:t>Copyright Peterson &amp; Davie, 2026</a:t>
+            </a:r>
+          </a:p>
+        </p:txBody>
+      </p:sp>
     </p:spTree>
   </p:cSld>
   <p:clrMapOvr>
@@ -7820,6 +8695,34 @@
           </a:prstGeom>
         </p:spPr>
       </p:pic>
+      <p:sp>
+        <p:nvSpPr>
+          <p:cNvPr id="5" name="Footer Placeholder 4">
+            <a:extLst>
+              <a:ext uri="{FF2B5EF4-FFF2-40B4-BE49-F238E27FC236}">
+                <a16:creationId xmlns:a16="http://schemas.microsoft.com/office/drawing/2014/main" id="{7C99424B-D878-22B6-1AB1-C607FC8A7EE7}"/>
+              </a:ext>
+            </a:extLst>
+          </p:cNvPr>
+          <p:cNvSpPr>
+            <a:spLocks noGrp="1"/>
+          </p:cNvSpPr>
+          <p:nvPr>
+            <p:ph type="ftr" sz="quarter" idx="11"/>
+          </p:nvPr>
+        </p:nvSpPr>
+        <p:spPr/>
+        <p:txBody>
+          <a:bodyPr/>
+          <a:lstStyle/>
+          <a:p>
+            <a:r>
+              <a:rPr lang="en-US"/>
+              <a:t>Copyright Peterson &amp; Davie, 2026</a:t>
+            </a:r>
+          </a:p>
+        </p:txBody>
+      </p:sp>
     </p:spTree>
   </p:cSld>
   <p:clrMapOvr>
@@ -7866,6 +8769,34 @@
           </a:p>
         </p:txBody>
       </p:sp>
+      <p:sp>
+        <p:nvSpPr>
+          <p:cNvPr id="3" name="Footer Placeholder 2">
+            <a:extLst>
+              <a:ext uri="{FF2B5EF4-FFF2-40B4-BE49-F238E27FC236}">
+                <a16:creationId xmlns:a16="http://schemas.microsoft.com/office/drawing/2014/main" id="{A62FA2B6-EC99-AED3-1D95-6712CB328D8B}"/>
+              </a:ext>
+            </a:extLst>
+          </p:cNvPr>
+          <p:cNvSpPr>
+            <a:spLocks noGrp="1"/>
+          </p:cNvSpPr>
+          <p:nvPr>
+            <p:ph type="ftr" sz="quarter" idx="11"/>
+          </p:nvPr>
+        </p:nvSpPr>
+        <p:spPr/>
+        <p:txBody>
+          <a:bodyPr/>
+          <a:lstStyle/>
+          <a:p>
+            <a:r>
+              <a:rPr lang="en-US"/>
+              <a:t>Copyright Peterson &amp; Davie, 2026</a:t>
+            </a:r>
+          </a:p>
+        </p:txBody>
+      </p:sp>
     </p:spTree>
   </p:cSld>
   <p:clrMapOvr>
@@ -8011,6 +8942,34 @@
           </a:prstGeom>
         </p:spPr>
       </p:pic>
+      <p:sp>
+        <p:nvSpPr>
+          <p:cNvPr id="5" name="Footer Placeholder 4">
+            <a:extLst>
+              <a:ext uri="{FF2B5EF4-FFF2-40B4-BE49-F238E27FC236}">
+                <a16:creationId xmlns:a16="http://schemas.microsoft.com/office/drawing/2014/main" id="{A18C0072-4ED6-7E02-B0B0-D545A9C38038}"/>
+              </a:ext>
+            </a:extLst>
+          </p:cNvPr>
+          <p:cNvSpPr>
+            <a:spLocks noGrp="1"/>
+          </p:cNvSpPr>
+          <p:nvPr>
+            <p:ph type="ftr" sz="quarter" idx="11"/>
+          </p:nvPr>
+        </p:nvSpPr>
+        <p:spPr/>
+        <p:txBody>
+          <a:bodyPr/>
+          <a:lstStyle/>
+          <a:p>
+            <a:r>
+              <a:rPr lang="en-US"/>
+              <a:t>Copyright Peterson &amp; Davie, 2026</a:t>
+            </a:r>
+          </a:p>
+        </p:txBody>
+      </p:sp>
     </p:spTree>
   </p:cSld>
   <p:clrMapOvr>
@@ -8168,6 +9127,34 @@
           </a:prstGeom>
         </p:spPr>
       </p:pic>
+      <p:sp>
+        <p:nvSpPr>
+          <p:cNvPr id="5" name="Footer Placeholder 4">
+            <a:extLst>
+              <a:ext uri="{FF2B5EF4-FFF2-40B4-BE49-F238E27FC236}">
+                <a16:creationId xmlns:a16="http://schemas.microsoft.com/office/drawing/2014/main" id="{2DB00DCD-CC38-7291-829D-943E9748E1F4}"/>
+              </a:ext>
+            </a:extLst>
+          </p:cNvPr>
+          <p:cNvSpPr>
+            <a:spLocks noGrp="1"/>
+          </p:cNvSpPr>
+          <p:nvPr>
+            <p:ph type="ftr" sz="quarter" idx="11"/>
+          </p:nvPr>
+        </p:nvSpPr>
+        <p:spPr/>
+        <p:txBody>
+          <a:bodyPr/>
+          <a:lstStyle/>
+          <a:p>
+            <a:r>
+              <a:rPr lang="en-US"/>
+              <a:t>Copyright Peterson &amp; Davie, 2026</a:t>
+            </a:r>
+          </a:p>
+        </p:txBody>
+      </p:sp>
     </p:spTree>
   </p:cSld>
   <p:clrMapOvr>
@@ -8360,6 +9347,34 @@
           </a:p>
         </p:txBody>
       </p:sp>
+      <p:sp>
+        <p:nvSpPr>
+          <p:cNvPr id="4" name="Footer Placeholder 3">
+            <a:extLst>
+              <a:ext uri="{FF2B5EF4-FFF2-40B4-BE49-F238E27FC236}">
+                <a16:creationId xmlns:a16="http://schemas.microsoft.com/office/drawing/2014/main" id="{DBB334A4-FD45-5498-FB50-7008C4C849B5}"/>
+              </a:ext>
+            </a:extLst>
+          </p:cNvPr>
+          <p:cNvSpPr>
+            <a:spLocks noGrp="1"/>
+          </p:cNvSpPr>
+          <p:nvPr>
+            <p:ph type="ftr" sz="quarter" idx="11"/>
+          </p:nvPr>
+        </p:nvSpPr>
+        <p:spPr/>
+        <p:txBody>
+          <a:bodyPr/>
+          <a:lstStyle/>
+          <a:p>
+            <a:r>
+              <a:rPr lang="en-US"/>
+              <a:t>Copyright Peterson &amp; Davie, 2026</a:t>
+            </a:r>
+          </a:p>
+        </p:txBody>
+      </p:sp>
     </p:spTree>
   </p:cSld>
   <p:clrMapOvr>
@@ -8488,6 +9503,34 @@
           </a:prstGeom>
         </p:spPr>
       </p:pic>
+      <p:sp>
+        <p:nvSpPr>
+          <p:cNvPr id="5" name="Footer Placeholder 4">
+            <a:extLst>
+              <a:ext uri="{FF2B5EF4-FFF2-40B4-BE49-F238E27FC236}">
+                <a16:creationId xmlns:a16="http://schemas.microsoft.com/office/drawing/2014/main" id="{49B4D6AC-EA40-81B3-0F97-1C6CE88093AD}"/>
+              </a:ext>
+            </a:extLst>
+          </p:cNvPr>
+          <p:cNvSpPr>
+            <a:spLocks noGrp="1"/>
+          </p:cNvSpPr>
+          <p:nvPr>
+            <p:ph type="ftr" sz="quarter" idx="11"/>
+          </p:nvPr>
+        </p:nvSpPr>
+        <p:spPr/>
+        <p:txBody>
+          <a:bodyPr/>
+          <a:lstStyle/>
+          <a:p>
+            <a:r>
+              <a:rPr lang="en-US"/>
+              <a:t>Copyright Peterson &amp; Davie, 2026</a:t>
+            </a:r>
+          </a:p>
+        </p:txBody>
+      </p:sp>
     </p:spTree>
   </p:cSld>
   <p:clrMapOvr>
@@ -8890,6 +9933,34 @@
           </a:prstGeom>
         </p:spPr>
       </p:pic>
+      <p:sp>
+        <p:nvSpPr>
+          <p:cNvPr id="7" name="Footer Placeholder 6">
+            <a:extLst>
+              <a:ext uri="{FF2B5EF4-FFF2-40B4-BE49-F238E27FC236}">
+                <a16:creationId xmlns:a16="http://schemas.microsoft.com/office/drawing/2014/main" id="{45069EDE-7C49-24A6-3350-A53EEC47745A}"/>
+              </a:ext>
+            </a:extLst>
+          </p:cNvPr>
+          <p:cNvSpPr>
+            <a:spLocks noGrp="1"/>
+          </p:cNvSpPr>
+          <p:nvPr>
+            <p:ph type="ftr" sz="quarter" idx="11"/>
+          </p:nvPr>
+        </p:nvSpPr>
+        <p:spPr/>
+        <p:txBody>
+          <a:bodyPr/>
+          <a:lstStyle/>
+          <a:p>
+            <a:r>
+              <a:rPr lang="en-US"/>
+              <a:t>Copyright Peterson &amp; Davie, 2026</a:t>
+            </a:r>
+          </a:p>
+        </p:txBody>
+      </p:sp>
     </p:spTree>
   </p:cSld>
   <p:clrMapOvr>
@@ -9076,6 +10147,34 @@
           </a:p>
         </p:txBody>
       </p:sp>
+      <p:sp>
+        <p:nvSpPr>
+          <p:cNvPr id="4" name="Footer Placeholder 3">
+            <a:extLst>
+              <a:ext uri="{FF2B5EF4-FFF2-40B4-BE49-F238E27FC236}">
+                <a16:creationId xmlns:a16="http://schemas.microsoft.com/office/drawing/2014/main" id="{23A60EE5-E0A5-00ED-641C-8B6EA7BAE4C9}"/>
+              </a:ext>
+            </a:extLst>
+          </p:cNvPr>
+          <p:cNvSpPr>
+            <a:spLocks noGrp="1"/>
+          </p:cNvSpPr>
+          <p:nvPr>
+            <p:ph type="ftr" sz="quarter" idx="11"/>
+          </p:nvPr>
+        </p:nvSpPr>
+        <p:spPr/>
+        <p:txBody>
+          <a:bodyPr/>
+          <a:lstStyle/>
+          <a:p>
+            <a:r>
+              <a:rPr lang="en-US"/>
+              <a:t>Copyright Peterson &amp; Davie, 2026</a:t>
+            </a:r>
+          </a:p>
+        </p:txBody>
+      </p:sp>
     </p:spTree>
   </p:cSld>
   <p:clrMapOvr>
@@ -9214,6 +10313,34 @@
           </a:prstGeom>
         </p:spPr>
       </p:pic>
+      <p:sp>
+        <p:nvSpPr>
+          <p:cNvPr id="5" name="Footer Placeholder 4">
+            <a:extLst>
+              <a:ext uri="{FF2B5EF4-FFF2-40B4-BE49-F238E27FC236}">
+                <a16:creationId xmlns:a16="http://schemas.microsoft.com/office/drawing/2014/main" id="{E946D361-5E1D-07CB-98D5-E119875697C7}"/>
+              </a:ext>
+            </a:extLst>
+          </p:cNvPr>
+          <p:cNvSpPr>
+            <a:spLocks noGrp="1"/>
+          </p:cNvSpPr>
+          <p:nvPr>
+            <p:ph type="ftr" sz="quarter" idx="11"/>
+          </p:nvPr>
+        </p:nvSpPr>
+        <p:spPr/>
+        <p:txBody>
+          <a:bodyPr/>
+          <a:lstStyle/>
+          <a:p>
+            <a:r>
+              <a:rPr lang="en-US"/>
+              <a:t>Copyright Peterson &amp; Davie, 2026</a:t>
+            </a:r>
+          </a:p>
+        </p:txBody>
+      </p:sp>
     </p:spTree>
   </p:cSld>
   <p:clrMapOvr>
@@ -9266,6 +10393,34 @@
           </a:p>
         </p:txBody>
       </p:sp>
+      <p:sp>
+        <p:nvSpPr>
+          <p:cNvPr id="3" name="Footer Placeholder 2">
+            <a:extLst>
+              <a:ext uri="{FF2B5EF4-FFF2-40B4-BE49-F238E27FC236}">
+                <a16:creationId xmlns:a16="http://schemas.microsoft.com/office/drawing/2014/main" id="{9FF34F01-1A7E-EFF4-DB1B-5A4A60B2D540}"/>
+              </a:ext>
+            </a:extLst>
+          </p:cNvPr>
+          <p:cNvSpPr>
+            <a:spLocks noGrp="1"/>
+          </p:cNvSpPr>
+          <p:nvPr>
+            <p:ph type="ftr" sz="quarter" idx="11"/>
+          </p:nvPr>
+        </p:nvSpPr>
+        <p:spPr/>
+        <p:txBody>
+          <a:bodyPr/>
+          <a:lstStyle/>
+          <a:p>
+            <a:r>
+              <a:rPr lang="en-US"/>
+              <a:t>Copyright Peterson &amp; Davie, 2026</a:t>
+            </a:r>
+          </a:p>
+        </p:txBody>
+      </p:sp>
     </p:spTree>
   </p:cSld>
   <p:clrMapOvr>
@@ -9467,6 +10622,34 @@
           </a:prstGeom>
         </p:spPr>
       </p:pic>
+      <p:sp>
+        <p:nvSpPr>
+          <p:cNvPr id="5" name="Footer Placeholder 4">
+            <a:extLst>
+              <a:ext uri="{FF2B5EF4-FFF2-40B4-BE49-F238E27FC236}">
+                <a16:creationId xmlns:a16="http://schemas.microsoft.com/office/drawing/2014/main" id="{F42C11C4-36AA-3DEC-0C16-23F88A71CD45}"/>
+              </a:ext>
+            </a:extLst>
+          </p:cNvPr>
+          <p:cNvSpPr>
+            <a:spLocks noGrp="1"/>
+          </p:cNvSpPr>
+          <p:nvPr>
+            <p:ph type="ftr" sz="quarter" idx="11"/>
+          </p:nvPr>
+        </p:nvSpPr>
+        <p:spPr/>
+        <p:txBody>
+          <a:bodyPr/>
+          <a:lstStyle/>
+          <a:p>
+            <a:r>
+              <a:rPr lang="en-US"/>
+              <a:t>Copyright Peterson &amp; Davie, 2026</a:t>
+            </a:r>
+          </a:p>
+        </p:txBody>
+      </p:sp>
     </p:spTree>
   </p:cSld>
   <p:clrMapOvr>
@@ -9633,6 +10816,34 @@
           </a:prstGeom>
         </p:spPr>
       </p:pic>
+      <p:sp>
+        <p:nvSpPr>
+          <p:cNvPr id="5" name="Footer Placeholder 4">
+            <a:extLst>
+              <a:ext uri="{FF2B5EF4-FFF2-40B4-BE49-F238E27FC236}">
+                <a16:creationId xmlns:a16="http://schemas.microsoft.com/office/drawing/2014/main" id="{BE73E926-B29B-CF46-7633-E7397DE20D9C}"/>
+              </a:ext>
+            </a:extLst>
+          </p:cNvPr>
+          <p:cNvSpPr>
+            <a:spLocks noGrp="1"/>
+          </p:cNvSpPr>
+          <p:nvPr>
+            <p:ph type="ftr" sz="quarter" idx="11"/>
+          </p:nvPr>
+        </p:nvSpPr>
+        <p:spPr/>
+        <p:txBody>
+          <a:bodyPr/>
+          <a:lstStyle/>
+          <a:p>
+            <a:r>
+              <a:rPr lang="en-US"/>
+              <a:t>Copyright Peterson &amp; Davie, 2026</a:t>
+            </a:r>
+          </a:p>
+        </p:txBody>
+      </p:sp>
     </p:spTree>
   </p:cSld>
   <p:clrMapOvr>
@@ -9782,6 +10993,34 @@
           </a:p>
         </p:txBody>
       </p:sp>
+      <p:sp>
+        <p:nvSpPr>
+          <p:cNvPr id="4" name="Footer Placeholder 3">
+            <a:extLst>
+              <a:ext uri="{FF2B5EF4-FFF2-40B4-BE49-F238E27FC236}">
+                <a16:creationId xmlns:a16="http://schemas.microsoft.com/office/drawing/2014/main" id="{B5BAD666-353E-501C-6FD6-1DC0870D8EAE}"/>
+              </a:ext>
+            </a:extLst>
+          </p:cNvPr>
+          <p:cNvSpPr>
+            <a:spLocks noGrp="1"/>
+          </p:cNvSpPr>
+          <p:nvPr>
+            <p:ph type="ftr" sz="quarter" idx="11"/>
+          </p:nvPr>
+        </p:nvSpPr>
+        <p:spPr/>
+        <p:txBody>
+          <a:bodyPr/>
+          <a:lstStyle/>
+          <a:p>
+            <a:r>
+              <a:rPr lang="en-US"/>
+              <a:t>Copyright Peterson &amp; Davie, 2026</a:t>
+            </a:r>
+          </a:p>
+        </p:txBody>
+      </p:sp>
     </p:spTree>
   </p:cSld>
   <p:clrMapOvr>
@@ -9943,6 +11182,34 @@
               <a:t>Failure causes switches to start over</a:t>
             </a:r>
             <a:endParaRPr sz="2400" dirty="0"/>
+          </a:p>
+        </p:txBody>
+      </p:sp>
+      <p:sp>
+        <p:nvSpPr>
+          <p:cNvPr id="5" name="Footer Placeholder 4">
+            <a:extLst>
+              <a:ext uri="{FF2B5EF4-FFF2-40B4-BE49-F238E27FC236}">
+                <a16:creationId xmlns:a16="http://schemas.microsoft.com/office/drawing/2014/main" id="{072B21BE-7C4F-0B23-3B9E-31D508D44509}"/>
+              </a:ext>
+            </a:extLst>
+          </p:cNvPr>
+          <p:cNvSpPr>
+            <a:spLocks noGrp="1"/>
+          </p:cNvSpPr>
+          <p:nvPr>
+            <p:ph type="ftr" sz="quarter" idx="11"/>
+          </p:nvPr>
+        </p:nvSpPr>
+        <p:spPr/>
+        <p:txBody>
+          <a:bodyPr/>
+          <a:lstStyle/>
+          <a:p>
+            <a:r>
+              <a:rPr lang="en-US"/>
+              <a:t>Copyright Peterson &amp; Davie, 2026</a:t>
+            </a:r>
           </a:p>
         </p:txBody>
       </p:sp>
@@ -10267,4 +11534,319 @@
     </a:ext>
   </a:extLst>
 </a:theme>
+</file>
+
+<file path=ppt/theme/theme2.xml><?xml version="1.0" encoding="utf-8"?>
+<a:theme xmlns:a="http://schemas.openxmlformats.org/drawingml/2006/main" name="Office Theme">
+  <a:themeElements>
+    <a:clrScheme name="Office">
+      <a:dk1>
+        <a:sysClr val="windowText" lastClr="000000"/>
+      </a:dk1>
+      <a:lt1>
+        <a:sysClr val="window" lastClr="FFFFFF"/>
+      </a:lt1>
+      <a:dk2>
+        <a:srgbClr val="0E2841"/>
+      </a:dk2>
+      <a:lt2>
+        <a:srgbClr val="E8E8E8"/>
+      </a:lt2>
+      <a:accent1>
+        <a:srgbClr val="156082"/>
+      </a:accent1>
+      <a:accent2>
+        <a:srgbClr val="E97132"/>
+      </a:accent2>
+      <a:accent3>
+        <a:srgbClr val="196B24"/>
+      </a:accent3>
+      <a:accent4>
+        <a:srgbClr val="0F9ED5"/>
+      </a:accent4>
+      <a:accent5>
+        <a:srgbClr val="A02B93"/>
+      </a:accent5>
+      <a:accent6>
+        <a:srgbClr val="4EA72E"/>
+      </a:accent6>
+      <a:hlink>
+        <a:srgbClr val="467886"/>
+      </a:hlink>
+      <a:folHlink>
+        <a:srgbClr val="96607D"/>
+      </a:folHlink>
+    </a:clrScheme>
+    <a:fontScheme name="Office">
+      <a:majorFont>
+        <a:latin typeface="Aptos Display" panose="02110004020202020204"/>
+        <a:ea typeface=""/>
+        <a:cs typeface=""/>
+        <a:font script="Jpan" typeface="游ゴシック Light"/>
+        <a:font script="Hang" typeface="맑은 고딕"/>
+        <a:font script="Hans" typeface="等线 Light"/>
+        <a:font script="Hant" typeface="新細明體"/>
+        <a:font script="Arab" typeface="Times New Roman"/>
+        <a:font script="Hebr" typeface="Times New Roman"/>
+        <a:font script="Thai" typeface="Angsana New"/>
+        <a:font script="Ethi" typeface="Nyala"/>
+        <a:font script="Beng" typeface="Vrinda"/>
+        <a:font script="Gujr" typeface="Shruti"/>
+        <a:font script="Khmr" typeface="MoolBoran"/>
+        <a:font script="Knda" typeface="Tunga"/>
+        <a:font script="Guru" typeface="Raavi"/>
+        <a:font script="Cans" typeface="Euphemia"/>
+        <a:font script="Cher" typeface="Plantagenet Cherokee"/>
+        <a:font script="Yiii" typeface="Microsoft Yi Baiti"/>
+        <a:font script="Tibt" typeface="Microsoft Himalaya"/>
+        <a:font script="Thaa" typeface="MV Boli"/>
+        <a:font script="Deva" typeface="Mangal"/>
+        <a:font script="Telu" typeface="Gautami"/>
+        <a:font script="Taml" typeface="Latha"/>
+        <a:font script="Syrc" typeface="Estrangelo Edessa"/>
+        <a:font script="Orya" typeface="Kalinga"/>
+        <a:font script="Mlym" typeface="Kartika"/>
+        <a:font script="Laoo" typeface="DokChampa"/>
+        <a:font script="Sinh" typeface="Iskoola Pota"/>
+        <a:font script="Mong" typeface="Mongolian Baiti"/>
+        <a:font script="Viet" typeface="Times New Roman"/>
+        <a:font script="Uigh" typeface="Microsoft Uighur"/>
+        <a:font script="Geor" typeface="Sylfaen"/>
+        <a:font script="Armn" typeface="Arial"/>
+        <a:font script="Bugi" typeface="Leelawadee UI"/>
+        <a:font script="Bopo" typeface="Microsoft JhengHei"/>
+        <a:font script="Java" typeface="Javanese Text"/>
+        <a:font script="Lisu" typeface="Segoe UI"/>
+        <a:font script="Mymr" typeface="Myanmar Text"/>
+        <a:font script="Nkoo" typeface="Ebrima"/>
+        <a:font script="Olck" typeface="Nirmala UI"/>
+        <a:font script="Osma" typeface="Ebrima"/>
+        <a:font script="Phag" typeface="Phagspa"/>
+        <a:font script="Syrn" typeface="Estrangelo Edessa"/>
+        <a:font script="Syrj" typeface="Estrangelo Edessa"/>
+        <a:font script="Syre" typeface="Estrangelo Edessa"/>
+        <a:font script="Sora" typeface="Nirmala UI"/>
+        <a:font script="Tale" typeface="Microsoft Tai Le"/>
+        <a:font script="Talu" typeface="Microsoft New Tai Lue"/>
+        <a:font script="Tfng" typeface="Ebrima"/>
+      </a:majorFont>
+      <a:minorFont>
+        <a:latin typeface="Aptos" panose="02110004020202020204"/>
+        <a:ea typeface=""/>
+        <a:cs typeface=""/>
+        <a:font script="Jpan" typeface="游ゴシック"/>
+        <a:font script="Hang" typeface="맑은 고딕"/>
+        <a:font script="Hans" typeface="等线"/>
+        <a:font script="Hant" typeface="新細明體"/>
+        <a:font script="Arab" typeface="Arial"/>
+        <a:font script="Hebr" typeface="Arial"/>
+        <a:font script="Thai" typeface="Cordia New"/>
+        <a:font script="Ethi" typeface="Nyala"/>
+        <a:font script="Beng" typeface="Vrinda"/>
+        <a:font script="Gujr" typeface="Shruti"/>
+        <a:font script="Khmr" typeface="DaunPenh"/>
+        <a:font script="Knda" typeface="Tunga"/>
+        <a:font script="Guru" typeface="Raavi"/>
+        <a:font script="Cans" typeface="Euphemia"/>
+        <a:font script="Cher" typeface="Plantagenet Cherokee"/>
+        <a:font script="Yiii" typeface="Microsoft Yi Baiti"/>
+        <a:font script="Tibt" typeface="Microsoft Himalaya"/>
+        <a:font script="Thaa" typeface="MV Boli"/>
+        <a:font script="Deva" typeface="Mangal"/>
+        <a:font script="Telu" typeface="Gautami"/>
+        <a:font script="Taml" typeface="Latha"/>
+        <a:font script="Syrc" typeface="Estrangelo Edessa"/>
+        <a:font script="Orya" typeface="Kalinga"/>
+        <a:font script="Mlym" typeface="Kartika"/>
+        <a:font script="Laoo" typeface="DokChampa"/>
+        <a:font script="Sinh" typeface="Iskoola Pota"/>
+        <a:font script="Mong" typeface="Mongolian Baiti"/>
+        <a:font script="Viet" typeface="Arial"/>
+        <a:font script="Uigh" typeface="Microsoft Uighur"/>
+        <a:font script="Geor" typeface="Sylfaen"/>
+        <a:font script="Armn" typeface="Arial"/>
+        <a:font script="Bugi" typeface="Leelawadee UI"/>
+        <a:font script="Bopo" typeface="Microsoft JhengHei"/>
+        <a:font script="Java" typeface="Javanese Text"/>
+        <a:font script="Lisu" typeface="Segoe UI"/>
+        <a:font script="Mymr" typeface="Myanmar Text"/>
+        <a:font script="Nkoo" typeface="Ebrima"/>
+        <a:font script="Olck" typeface="Nirmala UI"/>
+        <a:font script="Osma" typeface="Ebrima"/>
+        <a:font script="Phag" typeface="Phagspa"/>
+        <a:font script="Syrn" typeface="Estrangelo Edessa"/>
+        <a:font script="Syrj" typeface="Estrangelo Edessa"/>
+        <a:font script="Syre" typeface="Estrangelo Edessa"/>
+        <a:font script="Sora" typeface="Nirmala UI"/>
+        <a:font script="Tale" typeface="Microsoft Tai Le"/>
+        <a:font script="Talu" typeface="Microsoft New Tai Lue"/>
+        <a:font script="Tfng" typeface="Ebrima"/>
+      </a:minorFont>
+    </a:fontScheme>
+    <a:fmtScheme name="Office">
+      <a:fillStyleLst>
+        <a:solidFill>
+          <a:schemeClr val="phClr"/>
+        </a:solidFill>
+        <a:gradFill rotWithShape="1">
+          <a:gsLst>
+            <a:gs pos="0">
+              <a:schemeClr val="phClr">
+                <a:lumMod val="110000"/>
+                <a:satMod val="105000"/>
+                <a:tint val="67000"/>
+              </a:schemeClr>
+            </a:gs>
+            <a:gs pos="50000">
+              <a:schemeClr val="phClr">
+                <a:lumMod val="105000"/>
+                <a:satMod val="103000"/>
+                <a:tint val="73000"/>
+              </a:schemeClr>
+            </a:gs>
+            <a:gs pos="100000">
+              <a:schemeClr val="phClr">
+                <a:lumMod val="105000"/>
+                <a:satMod val="109000"/>
+                <a:tint val="81000"/>
+              </a:schemeClr>
+            </a:gs>
+          </a:gsLst>
+          <a:lin ang="5400000" scaled="0"/>
+        </a:gradFill>
+        <a:gradFill rotWithShape="1">
+          <a:gsLst>
+            <a:gs pos="0">
+              <a:schemeClr val="phClr">
+                <a:satMod val="103000"/>
+                <a:lumMod val="102000"/>
+                <a:tint val="94000"/>
+              </a:schemeClr>
+            </a:gs>
+            <a:gs pos="50000">
+              <a:schemeClr val="phClr">
+                <a:satMod val="110000"/>
+                <a:lumMod val="100000"/>
+                <a:shade val="100000"/>
+              </a:schemeClr>
+            </a:gs>
+            <a:gs pos="100000">
+              <a:schemeClr val="phClr">
+                <a:lumMod val="99000"/>
+                <a:satMod val="120000"/>
+                <a:shade val="78000"/>
+              </a:schemeClr>
+            </a:gs>
+          </a:gsLst>
+          <a:lin ang="5400000" scaled="0"/>
+        </a:gradFill>
+      </a:fillStyleLst>
+      <a:lnStyleLst>
+        <a:ln w="12700" cap="flat" cmpd="sng" algn="ctr">
+          <a:solidFill>
+            <a:schemeClr val="phClr"/>
+          </a:solidFill>
+          <a:prstDash val="solid"/>
+          <a:miter lim="800000"/>
+        </a:ln>
+        <a:ln w="19050" cap="flat" cmpd="sng" algn="ctr">
+          <a:solidFill>
+            <a:schemeClr val="phClr"/>
+          </a:solidFill>
+          <a:prstDash val="solid"/>
+          <a:miter lim="800000"/>
+        </a:ln>
+        <a:ln w="25400" cap="flat" cmpd="sng" algn="ctr">
+          <a:solidFill>
+            <a:schemeClr val="phClr"/>
+          </a:solidFill>
+          <a:prstDash val="solid"/>
+          <a:miter lim="800000"/>
+        </a:ln>
+      </a:lnStyleLst>
+      <a:effectStyleLst>
+        <a:effectStyle>
+          <a:effectLst/>
+        </a:effectStyle>
+        <a:effectStyle>
+          <a:effectLst/>
+        </a:effectStyle>
+        <a:effectStyle>
+          <a:effectLst>
+            <a:outerShdw blurRad="57150" dist="19050" dir="5400000" algn="ctr" rotWithShape="0">
+              <a:srgbClr val="000000">
+                <a:alpha val="63000"/>
+              </a:srgbClr>
+            </a:outerShdw>
+          </a:effectLst>
+        </a:effectStyle>
+      </a:effectStyleLst>
+      <a:bgFillStyleLst>
+        <a:solidFill>
+          <a:schemeClr val="phClr"/>
+        </a:solidFill>
+        <a:solidFill>
+          <a:schemeClr val="phClr">
+            <a:tint val="95000"/>
+            <a:satMod val="170000"/>
+          </a:schemeClr>
+        </a:solidFill>
+        <a:gradFill rotWithShape="1">
+          <a:gsLst>
+            <a:gs pos="0">
+              <a:schemeClr val="phClr">
+                <a:tint val="93000"/>
+                <a:satMod val="150000"/>
+                <a:shade val="98000"/>
+                <a:lumMod val="102000"/>
+              </a:schemeClr>
+            </a:gs>
+            <a:gs pos="50000">
+              <a:schemeClr val="phClr">
+                <a:tint val="98000"/>
+                <a:satMod val="130000"/>
+                <a:shade val="90000"/>
+                <a:lumMod val="103000"/>
+              </a:schemeClr>
+            </a:gs>
+            <a:gs pos="100000">
+              <a:schemeClr val="phClr">
+                <a:shade val="63000"/>
+                <a:satMod val="120000"/>
+              </a:schemeClr>
+            </a:gs>
+          </a:gsLst>
+          <a:lin ang="5400000" scaled="0"/>
+        </a:gradFill>
+      </a:bgFillStyleLst>
+    </a:fmtScheme>
+  </a:themeElements>
+  <a:objectDefaults>
+    <a:lnDef>
+      <a:spPr/>
+      <a:bodyPr/>
+      <a:lstStyle/>
+      <a:style>
+        <a:lnRef idx="2">
+          <a:schemeClr val="accent1"/>
+        </a:lnRef>
+        <a:fillRef idx="0">
+          <a:schemeClr val="accent1"/>
+        </a:fillRef>
+        <a:effectRef idx="1">
+          <a:schemeClr val="accent1"/>
+        </a:effectRef>
+        <a:fontRef idx="minor">
+          <a:schemeClr val="tx1"/>
+        </a:fontRef>
+      </a:style>
+    </a:lnDef>
+  </a:objectDefaults>
+  <a:extraClrSchemeLst/>
+  <a:extLst>
+    <a:ext uri="{05A4C25C-085E-4340-85A3-A5531E510DB2}">
+      <thm15:themeFamily xmlns:thm15="http://schemas.microsoft.com/office/thememl/2012/main" name="Office Theme" id="{2E142A2C-CD16-42D6-873A-C26D2A0506FA}" vid="{1BDDFF52-6CD6-40A5-AB3C-68EB2F1E4D0A}"/>
+    </a:ext>
+  </a:extLst>
+</a:theme>
 </file>